--- a/curriculum/M01/W07/L03/slides.pptx
+++ b/curriculum/M01/W07/L03/slides.pptx
@@ -5916,7 +5916,36 @@
                 <a:ea typeface="Malgun Gothic"/>
                 <a:cs typeface="Malgun Gothic"/>
               </a:rPr>
-              <a:t>가 되고 pyrophosphate가 떨어진다. 고에너지 중간체가 만들어지는 단계다. 2. </a:t>
+              <a:t>가 되고 pyrophosphate가 떨어진다. 고에너지 중간체가 만들어지는 단계다.</a:t>
+            </a:r>
+          </a:p>
+          <a:p>
+            <a:pPr>
+              <a:spcAft>
+                <a:spcPts val="900"/>
+              </a:spcAft>
+            </a:pPr>
+            <a:r>
+              <a:rPr sz="1400" b="1" i="0">
+                <a:solidFill>
+                  <a:srgbClr val="F2B705"/>
+                </a:solidFill>
+                <a:latin typeface="Malgun Gothic"/>
+                <a:ea typeface="Malgun Gothic"/>
+                <a:cs typeface="Malgun Gothic"/>
+              </a:rPr>
+              <a:t>•  </a:t>
+            </a:r>
+            <a:r>
+              <a:rPr sz="1400" b="0" i="0">
+                <a:solidFill>
+                  <a:srgbClr val="11202B"/>
+                </a:solidFill>
+                <a:latin typeface="Malgun Gothic"/>
+                <a:ea typeface="Malgun Gothic"/>
+                <a:cs typeface="Malgun Gothic"/>
+              </a:rPr>
+              <a:t>2. </a:t>
             </a:r>
             <a:r>
               <a:rPr sz="1400" b="1" i="0">
@@ -10386,11 +10415,40 @@
                 <a:ea typeface="Malgun Gothic"/>
                 <a:cs typeface="Malgun Gothic"/>
               </a:rPr>
-              <a:t>(AGGAGG에 가까운 서열)이 있고, 16S rRNA의 3′ 말단이 이 서열과 염기쌍으로 짝짓는다. 이 짝짓기가 30S 소단위를 개시 codon 위에 바로 올려놓는다. 2. 개시 tRNA는 </a:t>
-            </a:r>
+              <a:t>(AGGAGG에 가까운 서열)이 있고, 16S rRNA의 3′ 말단이 이 서열과 염기쌍으로 짝짓는다. 이 짝짓기가 30S 소단위를 개시 codon 위에 바로 올려놓는다.</a:t>
+            </a:r>
+          </a:p>
+          <a:p>
+            <a:pPr>
+              <a:spcAft>
+                <a:spcPts val="900"/>
+              </a:spcAft>
+            </a:pPr>
             <a:r>
               <a:rPr sz="1400" b="1" i="0">
                 <a:solidFill>
+                  <a:srgbClr val="F2B705"/>
+                </a:solidFill>
+                <a:latin typeface="Malgun Gothic"/>
+                <a:ea typeface="Malgun Gothic"/>
+                <a:cs typeface="Malgun Gothic"/>
+              </a:rPr>
+              <a:t>•  </a:t>
+            </a:r>
+            <a:r>
+              <a:rPr sz="1400" b="0" i="0">
+                <a:solidFill>
+                  <a:srgbClr val="11202B"/>
+                </a:solidFill>
+                <a:latin typeface="Malgun Gothic"/>
+                <a:ea typeface="Malgun Gothic"/>
+                <a:cs typeface="Malgun Gothic"/>
+              </a:rPr>
+              <a:t>2. 개시 tRNA는 </a:t>
+            </a:r>
+            <a:r>
+              <a:rPr sz="1400" b="1" i="0">
+                <a:solidFill>
                   <a:srgbClr val="11202B"/>
                 </a:solidFill>
                 <a:latin typeface="Malgun Gothic"/>
@@ -10408,11 +10466,40 @@
                 <a:ea typeface="Malgun Gothic"/>
                 <a:cs typeface="Malgun Gothic"/>
               </a:rPr>
-              <a:t>(fMet)을 싣는다. 이 tRNA만 P 자리에 직접 들어갈 수 있다. 3. 개시 인자는 셋이다. </a:t>
-            </a:r>
+              <a:t>(fMet)을 싣는다. 이 tRNA만 P 자리에 직접 들어갈 수 있다.</a:t>
+            </a:r>
+          </a:p>
+          <a:p>
+            <a:pPr>
+              <a:spcAft>
+                <a:spcPts val="900"/>
+              </a:spcAft>
+            </a:pPr>
             <a:r>
               <a:rPr sz="1400" b="1" i="0">
                 <a:solidFill>
+                  <a:srgbClr val="F2B705"/>
+                </a:solidFill>
+                <a:latin typeface="Malgun Gothic"/>
+                <a:ea typeface="Malgun Gothic"/>
+                <a:cs typeface="Malgun Gothic"/>
+              </a:rPr>
+              <a:t>•  </a:t>
+            </a:r>
+            <a:r>
+              <a:rPr sz="1400" b="0" i="0">
+                <a:solidFill>
+                  <a:srgbClr val="11202B"/>
+                </a:solidFill>
+                <a:latin typeface="Malgun Gothic"/>
+                <a:ea typeface="Malgun Gothic"/>
+                <a:cs typeface="Malgun Gothic"/>
+              </a:rPr>
+              <a:t>3. 개시 인자는 셋이다. </a:t>
+            </a:r>
+            <a:r>
+              <a:rPr sz="1400" b="1" i="0">
+                <a:solidFill>
                   <a:srgbClr val="11202B"/>
                 </a:solidFill>
                 <a:latin typeface="Malgun Gothic"/>
@@ -10474,7 +10561,36 @@
                 <a:ea typeface="Malgun Gothic"/>
                 <a:cs typeface="Malgun Gothic"/>
               </a:rPr>
-              <a:t>은 A 자리를 막아 개시 tRNA가 P 자리로 가게 한다. 4. 올바른 짝이 맞으면 IF2에 결합한 GTP가 가수분해되고 인자들이 떨어지며 50S가 결합해 70S 개시 복합체가 된다.</a:t>
+              <a:t>은 A 자리를 막아 개시 tRNA가 P 자리로 가게 한다.</a:t>
+            </a:r>
+          </a:p>
+          <a:p>
+            <a:pPr>
+              <a:spcAft>
+                <a:spcPts val="900"/>
+              </a:spcAft>
+            </a:pPr>
+            <a:r>
+              <a:rPr sz="1400" b="1" i="0">
+                <a:solidFill>
+                  <a:srgbClr val="F2B705"/>
+                </a:solidFill>
+                <a:latin typeface="Malgun Gothic"/>
+                <a:ea typeface="Malgun Gothic"/>
+                <a:cs typeface="Malgun Gothic"/>
+              </a:rPr>
+              <a:t>•  </a:t>
+            </a:r>
+            <a:r>
+              <a:rPr sz="1400" b="0" i="0">
+                <a:solidFill>
+                  <a:srgbClr val="11202B"/>
+                </a:solidFill>
+                <a:latin typeface="Malgun Gothic"/>
+                <a:ea typeface="Malgun Gothic"/>
+                <a:cs typeface="Malgun Gothic"/>
+              </a:rPr>
+              <a:t>4. 올바른 짝이 맞으면 IF2에 결합한 GTP가 가수분해되고 인자들이 떨어지며 50S가 결합해 70S 개시 복합체가 된다.</a:t>
             </a:r>
           </a:p>
           <a:p>
@@ -11006,6 +11122,24 @@
               </a:rPr>
               <a:t>cap과 poly(A)가 모두 있어야 개시 효율이 높아진다.</a:t>
             </a:r>
+          </a:p>
+          <a:p>
+            <a:pPr>
+              <a:spcAft>
+                <a:spcPts val="900"/>
+              </a:spcAft>
+            </a:pPr>
+            <a:r>
+              <a:rPr sz="1600" b="1" i="0">
+                <a:solidFill>
+                  <a:srgbClr val="F2B705"/>
+                </a:solidFill>
+                <a:latin typeface="Malgun Gothic"/>
+                <a:ea typeface="Malgun Gothic"/>
+                <a:cs typeface="Malgun Gothic"/>
+              </a:rPr>
+              <a:t>•  </a:t>
+            </a:r>
             <a:r>
               <a:rPr sz="1600" b="0" i="0">
                 <a:solidFill>
@@ -11015,7 +11149,7 @@
                 <a:ea typeface="Malgun Gothic"/>
                 <a:cs typeface="Malgun Gothic"/>
               </a:rPr>
-              <a:t> 2. 작은 소단위에 eIF2·GTP·Met-tRNAᵢ와 여러 인자가 실린 </a:t>
+              <a:t>2. 작은 소단위에 eIF2·GTP·Met-tRNAᵢ와 여러 인자가 실린 </a:t>
             </a:r>
             <a:r>
               <a:rPr sz="1600" b="1" i="0">
@@ -11037,11 +11171,40 @@
                 <a:ea typeface="Malgun Gothic"/>
                 <a:cs typeface="Malgun Gothic"/>
               </a:rPr>
-              <a:t>가 5′ 말단에 올라탄다. 3. 복합체가 5′→3′ 방향으로 전사체를 훑어 내려가며 개시 codon을 찾는다. 이것이 </a:t>
-            </a:r>
+              <a:t>가 5′ 말단에 올라탄다.</a:t>
+            </a:r>
+          </a:p>
+          <a:p>
+            <a:pPr>
+              <a:spcAft>
+                <a:spcPts val="900"/>
+              </a:spcAft>
+            </a:pPr>
             <a:r>
               <a:rPr sz="1600" b="1" i="0">
                 <a:solidFill>
+                  <a:srgbClr val="F2B705"/>
+                </a:solidFill>
+                <a:latin typeface="Malgun Gothic"/>
+                <a:ea typeface="Malgun Gothic"/>
+                <a:cs typeface="Malgun Gothic"/>
+              </a:rPr>
+              <a:t>•  </a:t>
+            </a:r>
+            <a:r>
+              <a:rPr sz="1600" b="0" i="0">
+                <a:solidFill>
+                  <a:srgbClr val="11202B"/>
+                </a:solidFill>
+                <a:latin typeface="Malgun Gothic"/>
+                <a:ea typeface="Malgun Gothic"/>
+                <a:cs typeface="Malgun Gothic"/>
+              </a:rPr>
+              <a:t>3. 복합체가 5′→3′ 방향으로 전사체를 훑어 내려가며 개시 codon을 찾는다. 이것이 </a:t>
+            </a:r>
+            <a:r>
+              <a:rPr sz="1600" b="1" i="0">
+                <a:solidFill>
                   <a:srgbClr val="11202B"/>
                 </a:solidFill>
                 <a:latin typeface="Malgun Gothic"/>
@@ -11059,7 +11222,36 @@
                 <a:ea typeface="Malgun Gothic"/>
                 <a:cs typeface="Malgun Gothic"/>
               </a:rPr>
-              <a:t>이다. 4. AUG를 만나면 개시 tRNA의 anticodon과 짝지어지고, eIF2의 GTP가 가수분해되며 멈춘다. </a:t>
+              <a:t>이다.</a:t>
+            </a:r>
+          </a:p>
+          <a:p>
+            <a:pPr>
+              <a:spcAft>
+                <a:spcPts val="900"/>
+              </a:spcAft>
+            </a:pPr>
+            <a:r>
+              <a:rPr sz="1600" b="1" i="0">
+                <a:solidFill>
+                  <a:srgbClr val="F2B705"/>
+                </a:solidFill>
+                <a:latin typeface="Malgun Gothic"/>
+                <a:ea typeface="Malgun Gothic"/>
+                <a:cs typeface="Malgun Gothic"/>
+              </a:rPr>
+              <a:t>•  </a:t>
+            </a:r>
+            <a:r>
+              <a:rPr sz="1600" b="0" i="0">
+                <a:solidFill>
+                  <a:srgbClr val="11202B"/>
+                </a:solidFill>
+                <a:latin typeface="Malgun Gothic"/>
+                <a:ea typeface="Malgun Gothic"/>
+                <a:cs typeface="Malgun Gothic"/>
+              </a:rPr>
+              <a:t>4. AUG를 만나면 개시 tRNA의 anticodon과 짝지어지고, eIF2의 GTP가 가수분해되며 멈춘다. </a:t>
             </a:r>
             <a:r>
               <a:rPr sz="1600" b="1" i="0">

--- a/curriculum/M01/W07/L03/slides.pptx
+++ b/curriculum/M01/W07/L03/slides.pptx
@@ -14530,7 +14530,7 @@
                 <a:ea typeface="Malgun Gothic"/>
                 <a:cs typeface="Malgun Gothic"/>
               </a:rPr>
-              <a:t>M01-W05-L03 유전정보의 흐름 — 중심원리, 유전암호표, 번역의 개요</a:t>
+              <a:t>M01-W05-L03 유전정보의 흐름: 복제·전사·번역 — 중심원리, 유전암호표, 번역의 개요</a:t>
             </a:r>
           </a:p>
           <a:p>
@@ -14617,7 +14617,7 @@
                 <a:ea typeface="Malgun Gothic"/>
                 <a:cs typeface="Malgun Gothic"/>
               </a:rPr>
-              <a:t>M01-W04-L02 생체에너지: 자유에너지와 ATP — ATP·GTP 가수분해와 반응의 짝지음</a:t>
+              <a:t>M01-W09-L02 생체에너지: 자유에너지와 ATP — ATP·GTP 가수분해와 반응의 짝지음</a:t>
             </a:r>
           </a:p>
         </p:txBody>
